--- a/docs/links-26/presentations/Second-Sight-for-managers.pptx
+++ b/docs/links-26/presentations/Second-Sight-for-managers.pptx
@@ -1546,7 +1546,7 @@
           <a:p>
             <a:r>
               <a:rPr lang="en-US" dirty="0"/>
-              <a:t>Days at work stay at 219 a year (218.6 exactly; Monday to Saturday; Sunday is overtime), under the ceiling agreed on 1 October 2026. Late finishes average about three more a year each, all of them from the December staffing — three to the close every day, where today’s weekdays have two — so no link meeting the same rules on 26 weeks could have fewer. Full weekends off are seven in 26 and never more than five weeks apart, and no week mixes earlies and lates. The one figure worse than today on rest is single rest days: five, against four. The average shift is two minutes longer.</a:t>
+              <a:t>Days at work stay at 219 a year (218.6 exactly; Monday to Saturday; Sunday is overtime), under the ceiling agreed on 1 October 2026. Late finishes average about three more a year each, all of them from the December staffing — three to the close every day, where today’s weekdays have two — so no link meeting the same rules on 26 weeks could have fewer. Full weekends off are seven in 26 and never more than five weeks apart, and no week mixes earlies and lates. The one figure worse than today on rest is single rest days: five, against four. The average shift is about two minutes longer.</a:t>
             </a:r>
             <a:endParaRPr lang="en-US" dirty="0"/>
           </a:p>
